--- a/production/Interception_Movements_Presentation_Styled.pptx
+++ b/production/Interception_Movements_Presentation_Styled.pptx
@@ -527,7 +527,7 @@
           <a:lstStyle/>
           <a:p>
             <a:r>
-              <a:t>Planned: 50 seconds. Slide 2 of 11.</a:t>
+              <a:t>Planned: 45 seconds. Slide 2 of 11.</a:t>
             </a:r>
           </a:p>
         </p:txBody>
@@ -1857,7 +1857,7 @@
           <a:lstStyle/>
           <a:p>
             <a:r>
-              <a:t>Planned: 45 seconds. Slide 5 of 11.</a:t>
+              <a:t>Planned: 55 seconds. Slide 5 of 11.</a:t>
             </a:r>
           </a:p>
         </p:txBody>
@@ -1927,7 +1927,7 @@
           <a:lstStyle/>
           <a:p>
             <a:r>
-              <a:t>Planned: 60 seconds. Slide 6 of 11.</a:t>
+              <a:t>Planned: 45 seconds. Slide 6 of 11.</a:t>
             </a:r>
           </a:p>
         </p:txBody>
@@ -1997,7 +1997,7 @@
           <a:lstStyle/>
           <a:p>
             <a:r>
-              <a:t>Planned: 30 seconds. Slide 7 of 11.</a:t>
+              <a:t>Planned: 40 seconds. Slide 7 of 11.</a:t>
             </a:r>
           </a:p>
         </p:txBody>
@@ -5536,61 +5536,6 @@
           </a:p>
         </p:txBody>
       </p:sp>
-      <p:sp>
-        <p:nvSpPr>
-          <p:cNvPr id="10" name="Rounded Rectangle 9"/>
-          <p:cNvSpPr/>
-          <p:nvPr/>
-        </p:nvSpPr>
-        <p:spPr>
-          <a:xfrm>
-            <a:off x="3570579" y="5532120"/>
-            <a:ext cx="5050536" cy="344424"/>
-          </a:xfrm>
-          <a:prstGeom prst="roundRect">
-            <a:avLst>
-              <a:gd name="adj" fmla="val 50000"/>
-            </a:avLst>
-          </a:prstGeom>
-          <a:solidFill>
-            <a:srgbClr val="202A3A"/>
-          </a:solidFill>
-          <a:ln>
-            <a:noFill/>
-          </a:ln>
-          <a:effectLst/>
-        </p:spPr>
-        <p:style>
-          <a:lnRef idx="1">
-            <a:schemeClr val="accent1"/>
-          </a:lnRef>
-          <a:fillRef idx="3">
-            <a:schemeClr val="accent1"/>
-          </a:fillRef>
-          <a:effectRef idx="2">
-            <a:schemeClr val="accent1"/>
-          </a:effectRef>
-          <a:fontRef idx="minor">
-            <a:schemeClr val="lt1"/>
-          </a:fontRef>
-        </p:style>
-        <p:txBody>
-          <a:bodyPr rtlCol="0" anchor="ctr" lIns="0" rIns="0"/>
-          <a:lstStyle/>
-          <a:p>
-            <a:pPr algn="ctr"/>
-            <a:r>
-              <a:rPr sz="1200" b="1">
-                <a:solidFill>
-                  <a:srgbClr val="C8D2DE"/>
-                </a:solidFill>
-                <a:latin typeface="Calibri"/>
-              </a:rPr>
-              <a:t>Planned talk: 10 minutes  (11 core slides + backup slides)</a:t>
-            </a:r>
-          </a:p>
-        </p:txBody>
-      </p:sp>
     </p:spTree>
   </p:cSld>
   <p:clrMapOvr>
@@ -5800,8 +5745,8 @@
         </p:nvSpPr>
         <p:spPr>
           <a:xfrm>
-            <a:off x="10012121" y="347472"/>
-            <a:ext cx="1402334" cy="327914"/>
+            <a:off x="10678490" y="347472"/>
+            <a:ext cx="735965" cy="327914"/>
           </a:xfrm>
           <a:prstGeom prst="roundRect">
             <a:avLst>
@@ -5842,7 +5787,7 @@
                 </a:solidFill>
                 <a:latin typeface="Calibri"/>
               </a:rPr>
-              <a:t>45 s  |  10/11</a:t>
+              <a:t>10/11</a:t>
             </a:r>
           </a:p>
         </p:txBody>
@@ -6560,8 +6505,8 @@
         </p:nvSpPr>
         <p:spPr>
           <a:xfrm>
-            <a:off x="10012121" y="347472"/>
-            <a:ext cx="1402334" cy="327914"/>
+            <a:off x="10678490" y="347472"/>
+            <a:ext cx="735965" cy="327914"/>
           </a:xfrm>
           <a:prstGeom prst="roundRect">
             <a:avLst>
@@ -6602,7 +6547,7 @@
                 </a:solidFill>
                 <a:latin typeface="Calibri"/>
               </a:rPr>
-              <a:t>80 s  |  11/11</a:t>
+              <a:t>11/11</a:t>
             </a:r>
           </a:p>
         </p:txBody>
@@ -13631,8 +13576,8 @@
         </p:nvSpPr>
         <p:spPr>
           <a:xfrm>
-            <a:off x="10086162" y="347472"/>
-            <a:ext cx="1328293" cy="327914"/>
+            <a:off x="10752531" y="347472"/>
+            <a:ext cx="661924" cy="327914"/>
           </a:xfrm>
           <a:prstGeom prst="roundRect">
             <a:avLst>
@@ -13673,7 +13618,7 @@
                 </a:solidFill>
                 <a:latin typeface="Calibri"/>
               </a:rPr>
-              <a:t>50 s  |  2/11</a:t>
+              <a:t>2/11</a:t>
             </a:r>
           </a:p>
         </p:txBody>
@@ -18748,8 +18693,8 @@
         </p:nvSpPr>
         <p:spPr>
           <a:xfrm>
-            <a:off x="10086162" y="347472"/>
-            <a:ext cx="1328293" cy="327914"/>
+            <a:off x="10752531" y="347472"/>
+            <a:ext cx="661924" cy="327914"/>
           </a:xfrm>
           <a:prstGeom prst="roundRect">
             <a:avLst>
@@ -18790,7 +18735,7 @@
                 </a:solidFill>
                 <a:latin typeface="Calibri"/>
               </a:rPr>
-              <a:t>40 s  |  3/11</a:t>
+              <a:t>3/11</a:t>
             </a:r>
           </a:p>
         </p:txBody>
@@ -19781,8 +19726,8 @@
         </p:nvSpPr>
         <p:spPr>
           <a:xfrm>
-            <a:off x="10086162" y="347472"/>
-            <a:ext cx="1328293" cy="327914"/>
+            <a:off x="10752531" y="347472"/>
+            <a:ext cx="661924" cy="327914"/>
           </a:xfrm>
           <a:prstGeom prst="roundRect">
             <a:avLst>
@@ -19823,7 +19768,7 @@
                 </a:solidFill>
                 <a:latin typeface="Calibri"/>
               </a:rPr>
-              <a:t>65 s  |  4/11</a:t>
+              <a:t>4/11</a:t>
             </a:r>
           </a:p>
         </p:txBody>
@@ -19891,9 +19836,9 @@
                 <a:tableStyleId>{5C22544A-7EE6-4342-B048-85BDC9FD1C3A}</a:tableStyleId>
               </a:tblPr>
               <a:tblGrid>
-                <a:gridCol w="1814583"/>
-                <a:gridCol w="3942026"/>
-                <a:gridCol w="4880604"/>
+                <a:gridCol w="1685678"/>
+                <a:gridCol w="4417641"/>
+                <a:gridCol w="4533894"/>
               </a:tblGrid>
               <a:tr h="473353">
                 <a:tc>
@@ -20134,7 +20079,7 @@
                           </a:solidFill>
                           <a:latin typeface="Calibri"/>
                         </a:rPr>
-                        <a:t>Cubic B-spline fit, 9 coefficients per axis -&gt; PCA to n latents</a:t>
+                        <a:t>Cubic B-spline with 5 knots fit, 9 coefficients per axis -&gt; PCA to n latents</a:t>
                       </a:r>
                     </a:p>
                   </a:txBody>
@@ -20460,7 +20405,7 @@
                 </a:solidFill>
                 <a:latin typeface="Calibri"/>
               </a:rPr>
-              <a:t>VAE - variational autoencoder, trained on the trajectory alone. CVAE - conditional variational autoencoder, which also receives the task conditions. CAE - conditional autoencoder, the same network without the variational latent.</a:t>
+              <a:t>VAE - Variational Autoencoder, trained on the trajectory alone. CVAE - Conditional Variational Autoencoder, which also receives the task conditions. CAE - Conditional Autoencoder, the same network without the variational latent.</a:t>
             </a:r>
           </a:p>
         </p:txBody>
@@ -20709,8 +20654,8 @@
         </p:nvSpPr>
         <p:spPr>
           <a:xfrm>
-            <a:off x="10086162" y="347472"/>
-            <a:ext cx="1328293" cy="327914"/>
+            <a:off x="10752531" y="347472"/>
+            <a:ext cx="661924" cy="327914"/>
           </a:xfrm>
           <a:prstGeom prst="roundRect">
             <a:avLst>
@@ -20751,7 +20696,7 @@
                 </a:solidFill>
                 <a:latin typeface="Calibri"/>
               </a:rPr>
-              <a:t>45 s  |  5/11</a:t>
+              <a:t>5/11</a:t>
             </a:r>
           </a:p>
         </p:txBody>
@@ -21731,8 +21676,8 @@
         </p:nvSpPr>
         <p:spPr>
           <a:xfrm>
-            <a:off x="10086162" y="347472"/>
-            <a:ext cx="1328293" cy="327914"/>
+            <a:off x="10752531" y="347472"/>
+            <a:ext cx="661924" cy="327914"/>
           </a:xfrm>
           <a:prstGeom prst="roundRect">
             <a:avLst>
@@ -21773,7 +21718,7 @@
                 </a:solidFill>
                 <a:latin typeface="Calibri"/>
               </a:rPr>
-              <a:t>60 s  |  6/11</a:t>
+              <a:t>6/11</a:t>
             </a:r>
           </a:p>
         </p:txBody>
@@ -22481,8 +22426,8 @@
         </p:nvSpPr>
         <p:spPr>
           <a:xfrm>
-            <a:off x="10086162" y="347472"/>
-            <a:ext cx="1328293" cy="327914"/>
+            <a:off x="10752531" y="347472"/>
+            <a:ext cx="661924" cy="327914"/>
           </a:xfrm>
           <a:prstGeom prst="roundRect">
             <a:avLst>
@@ -22523,7 +22468,7 @@
                 </a:solidFill>
                 <a:latin typeface="Calibri"/>
               </a:rPr>
-              <a:t>30 s  |  7/11</a:t>
+              <a:t>7/11</a:t>
             </a:r>
           </a:p>
         </p:txBody>
@@ -22581,7 +22526,7 @@
         <p:spPr>
           <a:xfrm>
             <a:off x="777240" y="1188720"/>
-            <a:ext cx="5097847" cy="3314828"/>
+            <a:ext cx="5021012" cy="4816230"/>
           </a:xfrm>
           <a:prstGeom prst="roundRect">
             <a:avLst/>
@@ -22626,8 +22571,8 @@
         </p:nvSpPr>
         <p:spPr>
           <a:xfrm>
-            <a:off x="1114873" y="1526353"/>
-            <a:ext cx="4422581" cy="246191"/>
+            <a:off x="1232386" y="1643866"/>
+            <a:ext cx="4110720" cy="331877"/>
           </a:xfrm>
           <a:prstGeom prst="rect">
             <a:avLst/>
@@ -22642,7 +22587,7 @@
           <a:p>
             <a:pPr algn="l"/>
             <a:r>
-              <a:rPr sz="1491" b="1">
+              <a:rPr sz="2010" b="1">
                 <a:solidFill>
                   <a:srgbClr val="1B6FEA"/>
                 </a:solidFill>
@@ -22661,8 +22606,8 @@
         </p:nvSpPr>
         <p:spPr>
           <a:xfrm>
-            <a:off x="1114873" y="1876431"/>
-            <a:ext cx="4422581" cy="422042"/>
+            <a:off x="1232386" y="2115787"/>
+            <a:ext cx="4110720" cy="1137864"/>
           </a:xfrm>
           <a:prstGeom prst="rect">
             <a:avLst/>
@@ -22677,7 +22622,7 @@
           <a:p>
             <a:pPr algn="l"/>
             <a:r>
-              <a:rPr sz="2556" b="1">
+              <a:rPr sz="3445" b="1">
                 <a:solidFill>
                   <a:srgbClr val="161E2E"/>
                 </a:solidFill>
@@ -22696,8 +22641,8 @@
         </p:nvSpPr>
         <p:spPr>
           <a:xfrm>
-            <a:off x="1114873" y="2454303"/>
-            <a:ext cx="4422581" cy="1289570"/>
+            <a:off x="1232386" y="3463718"/>
+            <a:ext cx="4110720" cy="2086086"/>
           </a:xfrm>
           <a:prstGeom prst="rect">
             <a:avLst/>
@@ -22712,7 +22657,7 @@
           <a:p>
             <a:pPr algn="l"/>
             <a:r>
-              <a:rPr sz="1562" b="0">
+              <a:rPr sz="2105" b="0">
                 <a:solidFill>
                   <a:srgbClr val="3D4756"/>
                 </a:solidFill>
@@ -22731,8 +22676,8 @@
         </p:nvSpPr>
         <p:spPr>
           <a:xfrm>
-            <a:off x="6316608" y="1188720"/>
-            <a:ext cx="5097847" cy="3314828"/>
+            <a:off x="6393443" y="1188720"/>
+            <a:ext cx="5021012" cy="4816230"/>
           </a:xfrm>
           <a:prstGeom prst="roundRect">
             <a:avLst/>
@@ -22777,8 +22722,8 @@
         </p:nvSpPr>
         <p:spPr>
           <a:xfrm>
-            <a:off x="6654241" y="1526353"/>
-            <a:ext cx="4422581" cy="246191"/>
+            <a:off x="6848589" y="1643866"/>
+            <a:ext cx="4110720" cy="331877"/>
           </a:xfrm>
           <a:prstGeom prst="rect">
             <a:avLst/>
@@ -22793,7 +22738,7 @@
           <a:p>
             <a:pPr algn="l"/>
             <a:r>
-              <a:rPr sz="1491" b="1">
+              <a:rPr sz="2010" b="1">
                 <a:solidFill>
                   <a:srgbClr val="1B6FEA"/>
                 </a:solidFill>
@@ -22812,8 +22757,8 @@
         </p:nvSpPr>
         <p:spPr>
           <a:xfrm>
-            <a:off x="6654241" y="1876431"/>
-            <a:ext cx="4422581" cy="844084"/>
+            <a:off x="6848589" y="2115787"/>
+            <a:ext cx="4110720" cy="1137864"/>
           </a:xfrm>
           <a:prstGeom prst="rect">
             <a:avLst/>
@@ -22828,13 +22773,13 @@
           <a:p>
             <a:pPr algn="l"/>
             <a:r>
-              <a:rPr sz="2556" b="1">
+              <a:rPr sz="3445" b="1">
                 <a:solidFill>
                   <a:srgbClr val="161E2E"/>
                 </a:solidFill>
                 <a:latin typeface="Calibri"/>
               </a:rPr>
-              <a:t>Two views of the distribution</a:t>
+              <a:t>Marginal Feature Matching</a:t>
             </a:r>
           </a:p>
         </p:txBody>
@@ -22847,8 +22792,8 @@
         </p:nvSpPr>
         <p:spPr>
           <a:xfrm>
-            <a:off x="6654241" y="2876345"/>
-            <a:ext cx="4422581" cy="1289570"/>
+            <a:off x="6848589" y="3463718"/>
+            <a:ext cx="4110720" cy="1390724"/>
           </a:xfrm>
           <a:prstGeom prst="rect">
             <a:avLst/>
@@ -22863,171 +22808,13 @@
           <a:p>
             <a:pPr algn="l"/>
             <a:r>
-              <a:rPr sz="1562" b="0">
+              <a:rPr sz="2105" b="0">
                 <a:solidFill>
                   <a:srgbClr val="3D4756"/>
                 </a:solidFill>
                 <a:latin typeface="Calibri"/>
               </a:rPr>
-              <a:t>One KS test per feature, averaged over the 11 into Mean KS. Energy discrepancy and MMD squared judge the joint structure of all 11 at once. Lower is better throughout.</a:t>
-            </a:r>
-          </a:p>
-        </p:txBody>
-      </p:sp>
-      <p:sp>
-        <p:nvSpPr>
-          <p:cNvPr id="16" name="Rectangle 15"/>
-          <p:cNvSpPr/>
-          <p:nvPr/>
-        </p:nvSpPr>
-        <p:spPr>
-          <a:xfrm>
-            <a:off x="777240" y="4789238"/>
-            <a:ext cx="10637215" cy="1394540"/>
-          </a:xfrm>
-          <a:prstGeom prst="rect">
-            <a:avLst/>
-          </a:prstGeom>
-          <a:solidFill>
-            <a:srgbClr val="EFF5FC"/>
-          </a:solidFill>
-          <a:ln>
-            <a:noFill/>
-          </a:ln>
-          <a:effectLst/>
-        </p:spPr>
-        <p:style>
-          <a:lnRef idx="1">
-            <a:schemeClr val="accent1"/>
-          </a:lnRef>
-          <a:fillRef idx="3">
-            <a:schemeClr val="accent1"/>
-          </a:fillRef>
-          <a:effectRef idx="2">
-            <a:schemeClr val="accent1"/>
-          </a:effectRef>
-          <a:fontRef idx="minor">
-            <a:schemeClr val="lt1"/>
-          </a:fontRef>
-        </p:style>
-        <p:txBody>
-          <a:bodyPr rtlCol="0" anchor="ctr"/>
-          <a:lstStyle/>
-          <a:p>
-            <a:pPr algn="ctr"/>
-          </a:p>
-        </p:txBody>
-      </p:sp>
-      <p:sp>
-        <p:nvSpPr>
-          <p:cNvPr id="17" name="Rectangle 16"/>
-          <p:cNvSpPr/>
-          <p:nvPr/>
-        </p:nvSpPr>
-        <p:spPr>
-          <a:xfrm>
-            <a:off x="777240" y="4789238"/>
-            <a:ext cx="77915" cy="1394540"/>
-          </a:xfrm>
-          <a:prstGeom prst="rect">
-            <a:avLst/>
-          </a:prstGeom>
-          <a:solidFill>
-            <a:srgbClr val="1B6FEA"/>
-          </a:solidFill>
-          <a:ln>
-            <a:noFill/>
-          </a:ln>
-          <a:effectLst/>
-        </p:spPr>
-        <p:style>
-          <a:lnRef idx="1">
-            <a:schemeClr val="accent1"/>
-          </a:lnRef>
-          <a:fillRef idx="3">
-            <a:schemeClr val="accent1"/>
-          </a:fillRef>
-          <a:effectRef idx="2">
-            <a:schemeClr val="accent1"/>
-          </a:effectRef>
-          <a:fontRef idx="minor">
-            <a:schemeClr val="lt1"/>
-          </a:fontRef>
-        </p:style>
-        <p:txBody>
-          <a:bodyPr rtlCol="0" anchor="ctr"/>
-          <a:lstStyle/>
-          <a:p>
-            <a:pPr algn="ctr"/>
-          </a:p>
-        </p:txBody>
-      </p:sp>
-      <p:sp>
-        <p:nvSpPr>
-          <p:cNvPr id="18" name="TextBox 17"/>
-          <p:cNvSpPr txBox="1"/>
-          <p:nvPr/>
-        </p:nvSpPr>
-        <p:spPr>
-          <a:xfrm>
-            <a:off x="1088901" y="4997012"/>
-            <a:ext cx="9884034" cy="281361"/>
-          </a:xfrm>
-          <a:prstGeom prst="rect">
-            <a:avLst/>
-          </a:prstGeom>
-          <a:noFill/>
-        </p:spPr>
-        <p:txBody>
-          <a:bodyPr wrap="square" lIns="0" rIns="0" tIns="0" bIns="0">
-            <a:spAutoFit/>
-          </a:bodyPr>
-          <a:lstStyle/>
-          <a:p>
-            <a:pPr algn="l"/>
-            <a:r>
-              <a:rPr sz="1704" b="1">
-                <a:solidFill>
-                  <a:srgbClr val="1B6FEA"/>
-                </a:solidFill>
-                <a:latin typeface="Calibri"/>
-              </a:rPr>
-              <a:t>One fixed yardstick for every model</a:t>
-            </a:r>
-          </a:p>
-        </p:txBody>
-      </p:sp>
-      <p:sp>
-        <p:nvSpPr>
-          <p:cNvPr id="19" name="TextBox 18"/>
-          <p:cNvSpPr txBox="1"/>
-          <p:nvPr/>
-        </p:nvSpPr>
-        <p:spPr>
-          <a:xfrm>
-            <a:off x="1088901" y="5408232"/>
-            <a:ext cx="9884034" cy="515828"/>
-          </a:xfrm>
-          <a:prstGeom prst="rect">
-            <a:avLst/>
-          </a:prstGeom>
-          <a:noFill/>
-        </p:spPr>
-        <p:txBody>
-          <a:bodyPr wrap="square" lIns="0" rIns="0" tIns="0" bIns="0">
-            <a:spAutoFit/>
-          </a:bodyPr>
-          <a:lstStyle/>
-          <a:p>
-            <a:pPr algn="l"/>
-            <a:r>
-              <a:rPr sz="1562" b="0">
-                <a:solidFill>
-                  <a:srgbClr val="3D4756"/>
-                </a:solidFill>
-                <a:latin typeface="Calibri"/>
-              </a:rPr>
-              <a:t>Feature scales and the RBF bandwidth are fitted on training participants only and then frozen, so every model is measured against the same geometry rather than one tuned to its own output.</a:t>
+              <a:t>One KS test per feature, averaged over the 11 features into Mean KS. Lower is better.</a:t>
             </a:r>
           </a:p>
         </p:txBody>
@@ -23241,8 +23028,8 @@
         </p:nvSpPr>
         <p:spPr>
           <a:xfrm>
-            <a:off x="10086162" y="347472"/>
-            <a:ext cx="1328293" cy="327914"/>
+            <a:off x="10752531" y="347472"/>
+            <a:ext cx="661924" cy="327914"/>
           </a:xfrm>
           <a:prstGeom prst="roundRect">
             <a:avLst>
@@ -23283,7 +23070,7 @@
                 </a:solidFill>
                 <a:latin typeface="Calibri"/>
               </a:rPr>
-              <a:t>55 s  |  8/11</a:t>
+              <a:t>8/11</a:t>
             </a:r>
           </a:p>
         </p:txBody>
@@ -23364,8 +23151,8 @@
         </p:nvSpPr>
         <p:spPr>
           <a:xfrm>
-            <a:off x="777240" y="4652300"/>
-            <a:ext cx="10637215" cy="1686388"/>
+            <a:off x="777240" y="4684504"/>
+            <a:ext cx="10637215" cy="1621990"/>
           </a:xfrm>
           <a:prstGeom prst="rect">
             <a:avLst/>
@@ -23408,8 +23195,8 @@
         </p:nvSpPr>
         <p:spPr>
           <a:xfrm>
-            <a:off x="777240" y="4652300"/>
-            <a:ext cx="64402" cy="1686388"/>
+            <a:off x="777240" y="4684504"/>
+            <a:ext cx="76479" cy="1621990"/>
           </a:xfrm>
           <a:prstGeom prst="rect">
             <a:avLst/>
@@ -23452,8 +23239,8 @@
         </p:nvSpPr>
         <p:spPr>
           <a:xfrm>
-            <a:off x="1034850" y="4824040"/>
-            <a:ext cx="10014658" cy="232564"/>
+            <a:off x="1083156" y="4888448"/>
+            <a:ext cx="9897918" cy="276174"/>
           </a:xfrm>
           <a:prstGeom prst="rect">
             <a:avLst/>
@@ -23468,7 +23255,7 @@
           <a:p>
             <a:pPr algn="l"/>
             <a:r>
-              <a:rPr sz="1408" b="1">
+              <a:rPr sz="1672" b="1">
                 <a:solidFill>
                   <a:srgbClr val="1B6FEA"/>
                 </a:solidFill>
@@ -23487,8 +23274,8 @@
         </p:nvSpPr>
         <p:spPr>
           <a:xfrm>
-            <a:off x="1034850" y="5163941"/>
-            <a:ext cx="10014658" cy="426368"/>
+            <a:off x="1083156" y="5292087"/>
+            <a:ext cx="9897918" cy="759477"/>
           </a:xfrm>
           <a:prstGeom prst="rect">
             <a:avLst/>
@@ -23503,48 +23290,13 @@
           <a:p>
             <a:pPr algn="l"/>
             <a:r>
-              <a:rPr sz="1291" b="0">
+              <a:rPr sz="1533" b="0">
                 <a:solidFill>
                   <a:srgbClr val="3D4756"/>
                 </a:solidFill>
                 <a:latin typeface="Calibri"/>
               </a:rPr>
               <a:t>Although Spline + PCA won pointwise reconstruction, VAE and CVAE achieve much better distribution matching (corrected p &lt; 0.001 under BH and Holm). VAE at n = 8 was set as the dashboard default.</a:t>
-            </a:r>
-          </a:p>
-        </p:txBody>
-      </p:sp>
-      <p:sp>
-        <p:nvSpPr>
-          <p:cNvPr id="13" name="TextBox 12"/>
-          <p:cNvSpPr txBox="1"/>
-          <p:nvPr/>
-        </p:nvSpPr>
-        <p:spPr>
-          <a:xfrm>
-            <a:off x="1034850" y="5697646"/>
-            <a:ext cx="10014658" cy="426368"/>
-          </a:xfrm>
-          <a:prstGeom prst="rect">
-            <a:avLst/>
-          </a:prstGeom>
-          <a:noFill/>
-        </p:spPr>
-        <p:txBody>
-          <a:bodyPr wrap="square" lIns="0" rIns="0" tIns="0" bIns="0">
-            <a:spAutoFit/>
-          </a:bodyPr>
-          <a:lstStyle/>
-          <a:p>
-            <a:pPr algn="l"/>
-            <a:r>
-              <a:rPr sz="1291" b="0">
-                <a:solidFill>
-                  <a:srgbClr val="3D4756"/>
-                </a:solidFill>
-                <a:latin typeface="Calibri"/>
-              </a:rPr>
-              <a:t>The two joint measures agree: at n = 8, VAE reaches energy 0.4110 and MMD squared 0.0639, against 0.7347 and 0.1153 for Spline + PCA.</a:t>
             </a:r>
           </a:p>
         </p:txBody>
@@ -23758,8 +23510,8 @@
         </p:nvSpPr>
         <p:spPr>
           <a:xfrm>
-            <a:off x="10086162" y="347472"/>
-            <a:ext cx="1328293" cy="327914"/>
+            <a:off x="10752531" y="347472"/>
+            <a:ext cx="661924" cy="327914"/>
           </a:xfrm>
           <a:prstGeom prst="roundRect">
             <a:avLst>
@@ -23800,7 +23552,7 @@
                 </a:solidFill>
                 <a:latin typeface="Calibri"/>
               </a:rPr>
-              <a:t>45 s  |  9/11</a:t>
+              <a:t>9/11</a:t>
             </a:r>
           </a:p>
         </p:txBody>
